--- a/classes/parte-16-capstones-y-preparacion-de-certificaciones/309-construccion-de-portafolio-y-home-lab-permanente/clase-309-presentacion.pptx
+++ b/classes/parte-16-capstones-y-preparacion-de-certificaciones/309-construccion-de-portafolio-y-home-lab-permanente/clase-309-presentacion.pptx
@@ -17,6 +17,10 @@
     <p:sldId id="265" r:id="rId16"/>
     <p:sldId id="266" r:id="rId17"/>
     <p:sldId id="267" r:id="rId18"/>
+    <p:sldId id="268" r:id="rId19"/>
+    <p:sldId id="269" r:id="rId20"/>
+    <p:sldId id="270" r:id="rId21"/>
+    <p:sldId id="271" r:id="rId22"/>
   </p:sldIdLst>
   <p:sldSz cx="9144000" cy="6858000" type="screen4x3"/>
   <p:notesSz cx="6858000" cy="9144000"/>
@@ -3198,7 +3202,7 @@
                   <a:srgbClr val="0B3D2E"/>
                 </a:solidFill>
               </a:rPr>
-              <a:t>⚠️ Errores comunes</a:t>
+              <a:t>🧪 Laboratorio guiado</a:t>
             </a:r>
           </a:p>
         </p:txBody>
@@ -3236,67 +3240,97 @@
                   <a:srgbClr val="22282E"/>
                 </a:solidFill>
               </a:rPr>
-              <a:t>•  "Publiqué datos reales" — Anonimización incompleta; revisa IPs, hostnames y capturas antes de subir.</a:t>
-            </a:r>
-          </a:p>
-          <a:p>
-            <a:pPr>
-              <a:spcAft>
-                <a:spcPts val="600"/>
-              </a:spcAft>
-            </a:pPr>
-            <a:r>
-              <a:rPr sz="1500">
-                <a:solidFill>
-                  <a:srgbClr val="22282E"/>
-                </a:solidFill>
-              </a:rPr>
-              <a:t>•  "Nadie entiende mis writeups" — Falta contexto; explica el razonamiento, no solo comandos.</a:t>
-            </a:r>
-          </a:p>
-          <a:p>
-            <a:pPr>
-              <a:spcAft>
-                <a:spcPts val="600"/>
-              </a:spcAft>
-            </a:pPr>
-            <a:r>
-              <a:rPr sz="1500">
-                <a:solidFill>
-                  <a:srgbClr val="22282E"/>
-                </a:solidFill>
-              </a:rPr>
-              <a:t>•  "El lab no se reproduce" — Pasos manuales sin IaC; automatiza con Vagrant/Ansible.</a:t>
-            </a:r>
-          </a:p>
-          <a:p>
-            <a:pPr>
-              <a:spcAft>
-                <a:spcPts val="600"/>
-              </a:spcAft>
-            </a:pPr>
-            <a:r>
-              <a:rPr sz="1500">
-                <a:solidFill>
-                  <a:srgbClr val="22282E"/>
-                </a:solidFill>
-              </a:rPr>
-              <a:t>•  "El blog no despliega" — Config de Pages incorrecta; revisa rama y ruta de publicación.</a:t>
-            </a:r>
-          </a:p>
-          <a:p>
-            <a:pPr>
-              <a:spcAft>
-                <a:spcPts val="600"/>
-              </a:spcAft>
-            </a:pPr>
-            <a:r>
-              <a:rPr sz="1500">
-                <a:solidFill>
-                  <a:srgbClr val="22282E"/>
-                </a:solidFill>
-              </a:rPr>
-              <a:t>•  "Mi perfil está disperso" — Sin marca coherente; unifica identidad entre plataformas.</a:t>
+              <a:t>•  Inventaria tu trabajo. Lista los entregables de los capstones (informe pentest 303, Red Team 305, Blue Team 306, DFIR 307, reporte 308) y selecciona los mejores.</a:t>
+            </a:r>
+          </a:p>
+          <a:p>
+            <a:pPr>
+              <a:spcAft>
+                <a:spcPts val="600"/>
+              </a:spcAft>
+            </a:pPr>
+            <a:r>
+              <a:rPr sz="1500">
+                <a:solidFill>
+                  <a:srgbClr val="22282E"/>
+                </a:solidFill>
+              </a:rPr>
+              <a:t>•  Anonimiza. Reemplaza IPs, nombres y datos reales por valores ficticios; verifica que no queda PII.</a:t>
+            </a:r>
+          </a:p>
+          <a:p>
+            <a:pPr>
+              <a:spcAft>
+                <a:spcPts val="600"/>
+              </a:spcAft>
+            </a:pPr>
+            <a:r>
+              <a:rPr sz="1500">
+                <a:solidFill>
+                  <a:srgbClr val="22282E"/>
+                </a:solidFill>
+              </a:rPr>
+              <a:t>•  Crea el repo del portafolio. Estructura: /writeups, /informes, /homelab, /tools, con un README.md índice.</a:t>
+            </a:r>
+          </a:p>
+          <a:p>
+            <a:pPr>
+              <a:spcAft>
+                <a:spcPts val="600"/>
+              </a:spcAft>
+            </a:pPr>
+            <a:r>
+              <a:rPr sz="1500">
+                <a:solidFill>
+                  <a:srgbClr val="22282E"/>
+                </a:solidFill>
+              </a:rPr>
+              <a:t>•  Escribe 2 writeups. Elige dos máquinas/retos y documenta el razonamiento (no solo la solución).</a:t>
+            </a:r>
+          </a:p>
+          <a:p>
+            <a:pPr>
+              <a:spcAft>
+                <a:spcPts val="600"/>
+              </a:spcAft>
+            </a:pPr>
+            <a:r>
+              <a:rPr sz="1500">
+                <a:solidFill>
+                  <a:srgbClr val="22282E"/>
+                </a:solidFill>
+              </a:rPr>
+              <a:t>•  Monta el blog. Genera un sitio con MkDocs/Hugo y publica los writeups; despliega en GitHub Pages.</a:t>
+            </a:r>
+          </a:p>
+          <a:p>
+            <a:pPr>
+              <a:spcAft>
+                <a:spcPts val="600"/>
+              </a:spcAft>
+            </a:pPr>
+            <a:r>
+              <a:rPr sz="1500">
+                <a:solidFill>
+                  <a:srgbClr val="22282E"/>
+                </a:solidFill>
+              </a:rPr>
+              <a:t>•  Codifica el home lab. Escribe un Vagrantfile que levante tu laboratorio base (Kali + víctima + SIEM):</a:t>
+            </a:r>
+          </a:p>
+          <a:p>
+            <a:pPr>
+              <a:spcAft>
+                <a:spcPts val="600"/>
+              </a:spcAft>
+            </a:pPr>
+            <a:r>
+              <a:rPr sz="1500">
+                <a:solidFill>
+                  <a:srgbClr val="22282E"/>
+                </a:solidFill>
+              </a:rPr>
+              <a:t>•  Aprovisiona con Ansible. Automatiza la instalación de herramientas para reconstruir el lab en minutos.</a:t>
             </a:r>
           </a:p>
         </p:txBody>
@@ -3347,7 +3381,7 @@
                   <a:srgbClr val="0B3D2E"/>
                 </a:solidFill>
               </a:rPr>
-              <a:t>❓ Preguntas frecuentes</a:t>
+              <a:t>✍️ Ejercicios</a:t>
             </a:r>
           </a:p>
         </p:txBody>
@@ -3385,97 +3419,82 @@
                   <a:srgbClr val="22282E"/>
                 </a:solidFill>
               </a:rPr>
-              <a:t>•  ❓ ¿GitHub privado o público?</a:t>
-            </a:r>
-          </a:p>
-          <a:p>
-            <a:pPr>
-              <a:spcAft>
-                <a:spcPts val="600"/>
-              </a:spcAft>
-            </a:pPr>
-            <a:r>
-              <a:rPr sz="1500">
-                <a:solidFill>
-                  <a:srgbClr val="22282E"/>
-                </a:solidFill>
-              </a:rPr>
-              <a:t>•  Público para el portafolio (es la vitrina). Mantén privado lo sensible o inacabado.</a:t>
-            </a:r>
-          </a:p>
-          <a:p>
-            <a:pPr>
-              <a:spcAft>
-                <a:spcPts val="600"/>
-              </a:spcAft>
-            </a:pPr>
-            <a:r>
-              <a:rPr sz="1500">
-                <a:solidFill>
-                  <a:srgbClr val="22282E"/>
-                </a:solidFill>
-              </a:rPr>
-              <a:t>•  ❓ ¿Cuántos writeups necesito?</a:t>
-            </a:r>
-          </a:p>
-          <a:p>
-            <a:pPr>
-              <a:spcAft>
-                <a:spcPts val="600"/>
-              </a:spcAft>
-            </a:pPr>
-            <a:r>
-              <a:rPr sz="1500">
-                <a:solidFill>
-                  <a:srgbClr val="22282E"/>
-                </a:solidFill>
-              </a:rPr>
-              <a:t>•  Pocos y buenos superan a muchos mediocres. Empieza con 2–3 que muestren razonamiento.</a:t>
-            </a:r>
-          </a:p>
-          <a:p>
-            <a:pPr>
-              <a:spcAft>
-                <a:spcPts val="600"/>
-              </a:spcAft>
-            </a:pPr>
-            <a:r>
-              <a:rPr sz="1500">
-                <a:solidFill>
-                  <a:srgbClr val="22282E"/>
-                </a:solidFill>
-              </a:rPr>
-              <a:t>•  ❓ ¿Puedo publicar informes de bug bounty?</a:t>
-            </a:r>
-          </a:p>
-          <a:p>
-            <a:pPr>
-              <a:spcAft>
-                <a:spcPts val="600"/>
-              </a:spcAft>
-            </a:pPr>
-            <a:r>
-              <a:rPr sz="1500">
-                <a:solidFill>
-                  <a:srgbClr val="22282E"/>
-                </a:solidFill>
-              </a:rPr>
-              <a:t>•  Solo si el programa lo permite y tras la divulgación coordinada. Anonimiza siempre.</a:t>
-            </a:r>
-          </a:p>
-          <a:p>
-            <a:pPr>
-              <a:spcAft>
-                <a:spcPts val="600"/>
-              </a:spcAft>
-            </a:pPr>
-            <a:r>
-              <a:rPr sz="1500">
-                <a:solidFill>
-                  <a:srgbClr val="22282E"/>
-                </a:solidFill>
-              </a:rPr>
-              <a:t>•  ❓ ¿Vale usar la nube en vez de local?</a:t>
+              <a:t>•  Estructura el árbol de carpetas de tu portafolio.</a:t>
+            </a:r>
+          </a:p>
+          <a:p>
+            <a:pPr>
+              <a:spcAft>
+                <a:spcPts val="600"/>
+              </a:spcAft>
+            </a:pPr>
+            <a:r>
+              <a:rPr sz="1500">
+                <a:solidFill>
+                  <a:srgbClr val="22282E"/>
+                </a:solidFill>
+              </a:rPr>
+              <a:t>•  Anonimiza un informe de capstone y verifica que no queda dato real.</a:t>
+            </a:r>
+          </a:p>
+          <a:p>
+            <a:pPr>
+              <a:spcAft>
+                <a:spcPts val="600"/>
+              </a:spcAft>
+            </a:pPr>
+            <a:r>
+              <a:rPr sz="1500">
+                <a:solidFill>
+                  <a:srgbClr val="22282E"/>
+                </a:solidFill>
+              </a:rPr>
+              <a:t>•  Escribe un writeup completo de una máquina.</a:t>
+            </a:r>
+          </a:p>
+          <a:p>
+            <a:pPr>
+              <a:spcAft>
+                <a:spcPts val="600"/>
+              </a:spcAft>
+            </a:pPr>
+            <a:r>
+              <a:rPr sz="1500">
+                <a:solidFill>
+                  <a:srgbClr val="22282E"/>
+                </a:solidFill>
+              </a:rPr>
+              <a:t>•  Crea un Vagrantfile que levante dos VMs en una red privada.</a:t>
+            </a:r>
+          </a:p>
+          <a:p>
+            <a:pPr>
+              <a:spcAft>
+                <a:spcPts val="600"/>
+              </a:spcAft>
+            </a:pPr>
+            <a:r>
+              <a:rPr sz="1500">
+                <a:solidFill>
+                  <a:srgbClr val="22282E"/>
+                </a:solidFill>
+              </a:rPr>
+              <a:t>•  Publica el blog en GitHub Pages con al menos un post.</a:t>
+            </a:r>
+          </a:p>
+          <a:p>
+            <a:pPr>
+              <a:spcAft>
+                <a:spcPts val="600"/>
+              </a:spcAft>
+            </a:pPr>
+            <a:r>
+              <a:rPr sz="1500">
+                <a:solidFill>
+                  <a:srgbClr val="22282E"/>
+                </a:solidFill>
+              </a:rPr>
+              <a:t>•  Redacta un README de home lab reproducible con diagrama.</a:t>
             </a:r>
           </a:p>
         </p:txBody>
@@ -3526,7 +3545,7 @@
                   <a:srgbClr val="0B3D2E"/>
                 </a:solidFill>
               </a:rPr>
-              <a:t>🔗 Referencias</a:t>
+              <a:t>📝 Reto verificable</a:t>
             </a:r>
           </a:p>
         </p:txBody>
@@ -3564,6 +3583,438 @@
                   <a:srgbClr val="22282E"/>
                 </a:solidFill>
               </a:rPr>
+              <a:t>•  Publica un portafolio (repo público + blog) que incluya: índice, al menos 2 writeups, 1 informe de capstone anonimizado y un home lab como código (Vagrant/Ansible) con documentación para levantarlo.</a:t>
+            </a:r>
+          </a:p>
+          <a:p>
+            <a:pPr>
+              <a:spcAft>
+                <a:spcPts val="600"/>
+              </a:spcAft>
+            </a:pPr>
+            <a:r>
+              <a:rPr sz="1500">
+                <a:solidFill>
+                  <a:srgbClr val="22282E"/>
+                </a:solidFill>
+              </a:rPr>
+              <a:t>•  Criterio de aceptación: un tercero puede clonar el repo y levantar el home lab con un comando documentado, el blog es accesible públicamente, los informes no contienen datos reales, y el índice…</a:t>
+            </a:r>
+          </a:p>
+        </p:txBody>
+      </p:sp>
+    </p:spTree>
+  </p:cSld>
+  <p:clrMapOvr>
+    <a:masterClrMapping/>
+  </p:clrMapOvr>
+</p:sld>
+</file>
+
+<file path=ppt/slides/slide13.xml><?xml version="1.0" encoding="utf-8"?>
+<p:sld xmlns:a="http://schemas.openxmlformats.org/drawingml/2006/main" xmlns:p="http://schemas.openxmlformats.org/presentationml/2006/main" xmlns:r="http://schemas.openxmlformats.org/officeDocument/2006/relationships">
+  <p:cSld>
+    <p:spTree>
+      <p:nvGrpSpPr>
+        <p:cNvPr id="1" name=""/>
+        <p:cNvGrpSpPr/>
+        <p:nvPr/>
+      </p:nvGrpSpPr>
+      <p:grpSpPr/>
+      <p:sp>
+        <p:nvSpPr>
+          <p:cNvPr id="2" name="TextBox 1"/>
+          <p:cNvSpPr txBox="1"/>
+          <p:nvPr/>
+        </p:nvSpPr>
+        <p:spPr>
+          <a:xfrm>
+            <a:off x="457200" y="320040"/>
+            <a:ext cx="8229600" cy="822960"/>
+          </a:xfrm>
+          <a:prstGeom prst="rect">
+            <a:avLst/>
+          </a:prstGeom>
+          <a:noFill/>
+        </p:spPr>
+        <p:txBody>
+          <a:bodyPr wrap="square">
+            <a:spAutoFit/>
+          </a:bodyPr>
+          <a:lstStyle/>
+          <a:p>
+            <a:r>
+              <a:rPr sz="2600" b="1">
+                <a:solidFill>
+                  <a:srgbClr val="0B3D2E"/>
+                </a:solidFill>
+              </a:rPr>
+              <a:t>⚠️ Errores comunes</a:t>
+            </a:r>
+          </a:p>
+        </p:txBody>
+      </p:sp>
+      <p:sp>
+        <p:nvSpPr>
+          <p:cNvPr id="3" name="TextBox 2"/>
+          <p:cNvSpPr txBox="1"/>
+          <p:nvPr/>
+        </p:nvSpPr>
+        <p:spPr>
+          <a:xfrm>
+            <a:off x="457200" y="1280160"/>
+            <a:ext cx="8229600" cy="4937760"/>
+          </a:xfrm>
+          <a:prstGeom prst="rect">
+            <a:avLst/>
+          </a:prstGeom>
+          <a:noFill/>
+        </p:spPr>
+        <p:txBody>
+          <a:bodyPr wrap="square">
+            <a:spAutoFit/>
+          </a:bodyPr>
+          <a:lstStyle/>
+          <a:p>
+            <a:pPr>
+              <a:spcAft>
+                <a:spcPts val="600"/>
+              </a:spcAft>
+            </a:pPr>
+            <a:r>
+              <a:rPr sz="1500">
+                <a:solidFill>
+                  <a:srgbClr val="22282E"/>
+                </a:solidFill>
+              </a:rPr>
+              <a:t>•  "Publiqué datos reales" — Anonimización incompleta; revisa IPs, hostnames y capturas antes de subir.</a:t>
+            </a:r>
+          </a:p>
+          <a:p>
+            <a:pPr>
+              <a:spcAft>
+                <a:spcPts val="600"/>
+              </a:spcAft>
+            </a:pPr>
+            <a:r>
+              <a:rPr sz="1500">
+                <a:solidFill>
+                  <a:srgbClr val="22282E"/>
+                </a:solidFill>
+              </a:rPr>
+              <a:t>•  "Nadie entiende mis writeups" — Falta contexto; explica el razonamiento, no solo comandos.</a:t>
+            </a:r>
+          </a:p>
+          <a:p>
+            <a:pPr>
+              <a:spcAft>
+                <a:spcPts val="600"/>
+              </a:spcAft>
+            </a:pPr>
+            <a:r>
+              <a:rPr sz="1500">
+                <a:solidFill>
+                  <a:srgbClr val="22282E"/>
+                </a:solidFill>
+              </a:rPr>
+              <a:t>•  "El lab no se reproduce" — Pasos manuales sin IaC; automatiza con Vagrant/Ansible.</a:t>
+            </a:r>
+          </a:p>
+          <a:p>
+            <a:pPr>
+              <a:spcAft>
+                <a:spcPts val="600"/>
+              </a:spcAft>
+            </a:pPr>
+            <a:r>
+              <a:rPr sz="1500">
+                <a:solidFill>
+                  <a:srgbClr val="22282E"/>
+                </a:solidFill>
+              </a:rPr>
+              <a:t>•  "El blog no despliega" — Config de Pages incorrecta; revisa rama y ruta de publicación.</a:t>
+            </a:r>
+          </a:p>
+          <a:p>
+            <a:pPr>
+              <a:spcAft>
+                <a:spcPts val="600"/>
+              </a:spcAft>
+            </a:pPr>
+            <a:r>
+              <a:rPr sz="1500">
+                <a:solidFill>
+                  <a:srgbClr val="22282E"/>
+                </a:solidFill>
+              </a:rPr>
+              <a:t>•  "Mi perfil está disperso" — Sin marca coherente; unifica identidad entre plataformas.</a:t>
+            </a:r>
+          </a:p>
+        </p:txBody>
+      </p:sp>
+    </p:spTree>
+  </p:cSld>
+  <p:clrMapOvr>
+    <a:masterClrMapping/>
+  </p:clrMapOvr>
+</p:sld>
+</file>
+
+<file path=ppt/slides/slide14.xml><?xml version="1.0" encoding="utf-8"?>
+<p:sld xmlns:a="http://schemas.openxmlformats.org/drawingml/2006/main" xmlns:p="http://schemas.openxmlformats.org/presentationml/2006/main" xmlns:r="http://schemas.openxmlformats.org/officeDocument/2006/relationships">
+  <p:cSld>
+    <p:spTree>
+      <p:nvGrpSpPr>
+        <p:cNvPr id="1" name=""/>
+        <p:cNvGrpSpPr/>
+        <p:nvPr/>
+      </p:nvGrpSpPr>
+      <p:grpSpPr/>
+      <p:sp>
+        <p:nvSpPr>
+          <p:cNvPr id="2" name="TextBox 1"/>
+          <p:cNvSpPr txBox="1"/>
+          <p:nvPr/>
+        </p:nvSpPr>
+        <p:spPr>
+          <a:xfrm>
+            <a:off x="457200" y="320040"/>
+            <a:ext cx="8229600" cy="822960"/>
+          </a:xfrm>
+          <a:prstGeom prst="rect">
+            <a:avLst/>
+          </a:prstGeom>
+          <a:noFill/>
+        </p:spPr>
+        <p:txBody>
+          <a:bodyPr wrap="square">
+            <a:spAutoFit/>
+          </a:bodyPr>
+          <a:lstStyle/>
+          <a:p>
+            <a:r>
+              <a:rPr sz="2600" b="1">
+                <a:solidFill>
+                  <a:srgbClr val="0B3D2E"/>
+                </a:solidFill>
+              </a:rPr>
+              <a:t>❓ Preguntas frecuentes</a:t>
+            </a:r>
+          </a:p>
+        </p:txBody>
+      </p:sp>
+      <p:sp>
+        <p:nvSpPr>
+          <p:cNvPr id="3" name="TextBox 2"/>
+          <p:cNvSpPr txBox="1"/>
+          <p:nvPr/>
+        </p:nvSpPr>
+        <p:spPr>
+          <a:xfrm>
+            <a:off x="457200" y="1280160"/>
+            <a:ext cx="8229600" cy="4937760"/>
+          </a:xfrm>
+          <a:prstGeom prst="rect">
+            <a:avLst/>
+          </a:prstGeom>
+          <a:noFill/>
+        </p:spPr>
+        <p:txBody>
+          <a:bodyPr wrap="square">
+            <a:spAutoFit/>
+          </a:bodyPr>
+          <a:lstStyle/>
+          <a:p>
+            <a:pPr>
+              <a:spcAft>
+                <a:spcPts val="600"/>
+              </a:spcAft>
+            </a:pPr>
+            <a:r>
+              <a:rPr sz="1500">
+                <a:solidFill>
+                  <a:srgbClr val="22282E"/>
+                </a:solidFill>
+              </a:rPr>
+              <a:t>•  ❓ ¿GitHub privado o público?</a:t>
+            </a:r>
+          </a:p>
+          <a:p>
+            <a:pPr>
+              <a:spcAft>
+                <a:spcPts val="600"/>
+              </a:spcAft>
+            </a:pPr>
+            <a:r>
+              <a:rPr sz="1500">
+                <a:solidFill>
+                  <a:srgbClr val="22282E"/>
+                </a:solidFill>
+              </a:rPr>
+              <a:t>•  Público para el portafolio (es la vitrina). Mantén privado lo sensible o inacabado.</a:t>
+            </a:r>
+          </a:p>
+          <a:p>
+            <a:pPr>
+              <a:spcAft>
+                <a:spcPts val="600"/>
+              </a:spcAft>
+            </a:pPr>
+            <a:r>
+              <a:rPr sz="1500">
+                <a:solidFill>
+                  <a:srgbClr val="22282E"/>
+                </a:solidFill>
+              </a:rPr>
+              <a:t>•  ❓ ¿Cuántos writeups necesito?</a:t>
+            </a:r>
+          </a:p>
+          <a:p>
+            <a:pPr>
+              <a:spcAft>
+                <a:spcPts val="600"/>
+              </a:spcAft>
+            </a:pPr>
+            <a:r>
+              <a:rPr sz="1500">
+                <a:solidFill>
+                  <a:srgbClr val="22282E"/>
+                </a:solidFill>
+              </a:rPr>
+              <a:t>•  Pocos y buenos superan a muchos mediocres. Empieza con 2–3 que muestren razonamiento.</a:t>
+            </a:r>
+          </a:p>
+          <a:p>
+            <a:pPr>
+              <a:spcAft>
+                <a:spcPts val="600"/>
+              </a:spcAft>
+            </a:pPr>
+            <a:r>
+              <a:rPr sz="1500">
+                <a:solidFill>
+                  <a:srgbClr val="22282E"/>
+                </a:solidFill>
+              </a:rPr>
+              <a:t>•  ❓ ¿Puedo publicar informes de bug bounty?</a:t>
+            </a:r>
+          </a:p>
+          <a:p>
+            <a:pPr>
+              <a:spcAft>
+                <a:spcPts val="600"/>
+              </a:spcAft>
+            </a:pPr>
+            <a:r>
+              <a:rPr sz="1500">
+                <a:solidFill>
+                  <a:srgbClr val="22282E"/>
+                </a:solidFill>
+              </a:rPr>
+              <a:t>•  Solo si el programa lo permite y tras la divulgación coordinada. Anonimiza siempre.</a:t>
+            </a:r>
+          </a:p>
+          <a:p>
+            <a:pPr>
+              <a:spcAft>
+                <a:spcPts val="600"/>
+              </a:spcAft>
+            </a:pPr>
+            <a:r>
+              <a:rPr sz="1500">
+                <a:solidFill>
+                  <a:srgbClr val="22282E"/>
+                </a:solidFill>
+              </a:rPr>
+              <a:t>•  ❓ ¿Vale usar la nube en vez de local?</a:t>
+            </a:r>
+          </a:p>
+        </p:txBody>
+      </p:sp>
+    </p:spTree>
+  </p:cSld>
+  <p:clrMapOvr>
+    <a:masterClrMapping/>
+  </p:clrMapOvr>
+</p:sld>
+</file>
+
+<file path=ppt/slides/slide15.xml><?xml version="1.0" encoding="utf-8"?>
+<p:sld xmlns:a="http://schemas.openxmlformats.org/drawingml/2006/main" xmlns:p="http://schemas.openxmlformats.org/presentationml/2006/main" xmlns:r="http://schemas.openxmlformats.org/officeDocument/2006/relationships">
+  <p:cSld>
+    <p:spTree>
+      <p:nvGrpSpPr>
+        <p:cNvPr id="1" name=""/>
+        <p:cNvGrpSpPr/>
+        <p:nvPr/>
+      </p:nvGrpSpPr>
+      <p:grpSpPr/>
+      <p:sp>
+        <p:nvSpPr>
+          <p:cNvPr id="2" name="TextBox 1"/>
+          <p:cNvSpPr txBox="1"/>
+          <p:nvPr/>
+        </p:nvSpPr>
+        <p:spPr>
+          <a:xfrm>
+            <a:off x="457200" y="320040"/>
+            <a:ext cx="8229600" cy="822960"/>
+          </a:xfrm>
+          <a:prstGeom prst="rect">
+            <a:avLst/>
+          </a:prstGeom>
+          <a:noFill/>
+        </p:spPr>
+        <p:txBody>
+          <a:bodyPr wrap="square">
+            <a:spAutoFit/>
+          </a:bodyPr>
+          <a:lstStyle/>
+          <a:p>
+            <a:r>
+              <a:rPr sz="2600" b="1">
+                <a:solidFill>
+                  <a:srgbClr val="0B3D2E"/>
+                </a:solidFill>
+              </a:rPr>
+              <a:t>🔗 Referencias</a:t>
+            </a:r>
+          </a:p>
+        </p:txBody>
+      </p:sp>
+      <p:sp>
+        <p:nvSpPr>
+          <p:cNvPr id="3" name="TextBox 2"/>
+          <p:cNvSpPr txBox="1"/>
+          <p:nvPr/>
+        </p:nvSpPr>
+        <p:spPr>
+          <a:xfrm>
+            <a:off x="457200" y="1280160"/>
+            <a:ext cx="8229600" cy="4937760"/>
+          </a:xfrm>
+          <a:prstGeom prst="rect">
+            <a:avLst/>
+          </a:prstGeom>
+          <a:noFill/>
+        </p:spPr>
+        <p:txBody>
+          <a:bodyPr wrap="square">
+            <a:spAutoFit/>
+          </a:bodyPr>
+          <a:lstStyle/>
+          <a:p>
+            <a:pPr>
+              <a:spcAft>
+                <a:spcPts val="600"/>
+              </a:spcAft>
+            </a:pPr>
+            <a:r>
+              <a:rPr sz="1500">
+                <a:solidFill>
+                  <a:srgbClr val="22282E"/>
+                </a:solidFill>
+              </a:rPr>
               <a:t>•  DetectionLab: &lt;https://github.com/clong/DetectionLab&gt;</a:t>
             </a:r>
           </a:p>
@@ -3629,6 +4080,81 @@
           </a:p>
         </p:txBody>
       </p:sp>
+    </p:spTree>
+  </p:cSld>
+  <p:clrMapOvr>
+    <a:masterClrMapping/>
+  </p:clrMapOvr>
+</p:sld>
+</file>
+
+<file path=ppt/slides/slide16.xml><?xml version="1.0" encoding="utf-8"?>
+<p:sld xmlns:a="http://schemas.openxmlformats.org/drawingml/2006/main" xmlns:p="http://schemas.openxmlformats.org/presentationml/2006/main" xmlns:r="http://schemas.openxmlformats.org/officeDocument/2006/relationships">
+  <p:cSld>
+    <p:spTree>
+      <p:nvGrpSpPr>
+        <p:cNvPr id="1" name=""/>
+        <p:cNvGrpSpPr/>
+        <p:nvPr/>
+      </p:nvGrpSpPr>
+      <p:grpSpPr/>
+      <p:sp>
+        <p:nvSpPr>
+          <p:cNvPr id="2" name="TextBox 1"/>
+          <p:cNvSpPr txBox="1"/>
+          <p:nvPr/>
+        </p:nvSpPr>
+        <p:spPr>
+          <a:xfrm>
+            <a:off x="457200" y="274320"/>
+            <a:ext cx="8229600" cy="640080"/>
+          </a:xfrm>
+          <a:prstGeom prst="rect">
+            <a:avLst/>
+          </a:prstGeom>
+          <a:noFill/>
+        </p:spPr>
+        <p:txBody>
+          <a:bodyPr wrap="square">
+            <a:spAutoFit/>
+          </a:bodyPr>
+          <a:lstStyle/>
+          <a:p>
+            <a:r>
+              <a:rPr sz="2200" b="1">
+                <a:solidFill>
+                  <a:srgbClr val="0B3D2E"/>
+                </a:solidFill>
+              </a:rPr>
+              <a:t>Diagrama de la clase</a:t>
+            </a:r>
+          </a:p>
+        </p:txBody>
+      </p:sp>
+      <p:pic>
+        <p:nvPicPr>
+          <p:cNvPr id="3" name="Picture 2" descr="01b9d6aaef4c3558.png"/>
+          <p:cNvPicPr>
+            <a:picLocks noChangeAspect="1"/>
+          </p:cNvPicPr>
+          <p:nvPr/>
+        </p:nvPicPr>
+        <p:blipFill>
+          <a:blip r:embed="rId2"/>
+          <a:stretch>
+            <a:fillRect/>
+          </a:stretch>
+        </p:blipFill>
+        <p:spPr>
+          <a:xfrm>
+            <a:off x="457200" y="3335789"/>
+            <a:ext cx="8229600" cy="826502"/>
+          </a:xfrm>
+          <a:prstGeom prst="rect">
+            <a:avLst/>
+          </a:prstGeom>
+        </p:spPr>
+      </p:pic>
     </p:spTree>
   </p:cSld>
   <p:clrMapOvr>
@@ -3713,7 +4239,7 @@
                   <a:srgbClr val="22282E"/>
                 </a:solidFill>
               </a:rPr>
-              <a:t>•  Convertir el trabajo de las 308 clases anteriores en evidencia empleable: un portafolio público (writeups, informes anonimizados, repos) y un home lab permanente y reproducible donde seguir practicando. El objetivo es que un reclutador o cliente pueda, en cinco minutos, verificar tu competencia real. Integra los entregables de los capstones (Clases 303, 305, 306, 307, 308) en una vitrina profesional.</a:t>
+              <a:t>•  Convertir el trabajo de las 308 clases anteriores en evidencia empleable: un portafolio público (writeups, informes anonimizados, repos) y un home lab permanente y reproducible donde seguir…</a:t>
             </a:r>
           </a:p>
         </p:txBody>
@@ -4107,7 +4633,7 @@
                   <a:srgbClr val="0B3D2E"/>
                 </a:solidFill>
               </a:rPr>
-              <a:t>📖 Definiciones y características</a:t>
+              <a:t>🧠 Explicación en profundidad</a:t>
             </a:r>
           </a:p>
         </p:txBody>
@@ -4145,82 +4671,22 @@
                   <a:srgbClr val="22282E"/>
                 </a:solidFill>
               </a:rPr>
-              <a:t>•  Portafolio: colección curada de trabajo demostrable. Característica: prioriza calidad y evidencia sobre cantidad.</a:t>
-            </a:r>
-          </a:p>
-          <a:p>
-            <a:pPr>
-              <a:spcAft>
-                <a:spcPts val="600"/>
-              </a:spcAft>
-            </a:pPr>
-            <a:r>
-              <a:rPr sz="1500">
-                <a:solidFill>
-                  <a:srgbClr val="22282E"/>
-                </a:solidFill>
-              </a:rPr>
-              <a:t>•  Writeup: explicación paso a paso de cómo resolviste un reto. Característica: revela tu proceso de pensamiento.</a:t>
-            </a:r>
-          </a:p>
-          <a:p>
-            <a:pPr>
-              <a:spcAft>
-                <a:spcPts val="600"/>
-              </a:spcAft>
-            </a:pPr>
-            <a:r>
-              <a:rPr sz="1500">
-                <a:solidFill>
-                  <a:srgbClr val="22282E"/>
-                </a:solidFill>
-              </a:rPr>
-              <a:t>•  Infraestructura como código (IaC): definir el lab en archivos (Vagrant/Terraform/Ansible). Característica: reproducible y versionable.</a:t>
-            </a:r>
-          </a:p>
-          <a:p>
-            <a:pPr>
-              <a:spcAft>
-                <a:spcPts val="600"/>
-              </a:spcAft>
-            </a:pPr>
-            <a:r>
-              <a:rPr sz="1500">
-                <a:solidFill>
-                  <a:srgbClr val="22282E"/>
-                </a:solidFill>
-              </a:rPr>
-              <a:t>•  Home lab: entorno personal de práctica permanente. Característica: aislado, seguro y desechable.</a:t>
-            </a:r>
-          </a:p>
-          <a:p>
-            <a:pPr>
-              <a:spcAft>
-                <a:spcPts val="600"/>
-              </a:spcAft>
-            </a:pPr>
-            <a:r>
-              <a:rPr sz="1500">
-                <a:solidFill>
-                  <a:srgbClr val="22282E"/>
-                </a:solidFill>
-              </a:rPr>
-              <a:t>•  Anonimización: eliminar datos identificables antes de publicar. Característica: obligatoria en informes reales.</a:t>
-            </a:r>
-          </a:p>
-          <a:p>
-            <a:pPr>
-              <a:spcAft>
-                <a:spcPts val="600"/>
-              </a:spcAft>
-            </a:pPr>
-            <a:r>
-              <a:rPr sz="1500">
-                <a:solidFill>
-                  <a:srgbClr val="22282E"/>
-                </a:solidFill>
-              </a:rPr>
-              <a:t>•  Marca profesional: coherencia de perfil entre GitHub, blog y LinkedIn. Característica: facilita que te encuentren.</a:t>
+              <a:t>•  El portafolio demuestra razonamiento y reproducción sin publicar secretos, datos o material ofensivo dañino. El laboratorio necesita inventario, aislamiento, snapshots y costes sostenibles. La clase…</a:t>
+            </a:r>
+          </a:p>
+          <a:p>
+            <a:pPr>
+              <a:spcAft>
+                <a:spcPts val="600"/>
+              </a:spcAft>
+            </a:pPr>
+            <a:r>
+              <a:rPr sz="1500">
+                <a:solidFill>
+                  <a:srgbClr val="22282E"/>
+                </a:solidFill>
+              </a:rPr>
+              <a:t>•  Un proyecto muestra una herramienta pero ninguna decisión. Se reescribe con hipótesis, alternativas, resultados y limitaciones.</a:t>
             </a:r>
           </a:p>
         </p:txBody>
@@ -4271,7 +4737,7 @@
                   <a:srgbClr val="0B3D2E"/>
                 </a:solidFill>
               </a:rPr>
-              <a:t>🧰 Herramientas y preparación</a:t>
+              <a:t>📔 Glosario operativo</a:t>
             </a:r>
           </a:p>
         </p:txBody>
@@ -4309,67 +4775,52 @@
                   <a:srgbClr val="22282E"/>
                 </a:solidFill>
               </a:rPr>
-              <a:t>•  GitHub/GitLab para repos y para alojar el blog (GitHub Pages).</a:t>
-            </a:r>
-          </a:p>
-          <a:p>
-            <a:pPr>
-              <a:spcAft>
-                <a:spcPts val="600"/>
-              </a:spcAft>
-            </a:pPr>
-            <a:r>
-              <a:rPr sz="1500">
-                <a:solidFill>
-                  <a:srgbClr val="22282E"/>
-                </a:solidFill>
-              </a:rPr>
-              <a:t>•  Blog estático: Hugo, Jekyll o MkDocs.</a:t>
-            </a:r>
-          </a:p>
-          <a:p>
-            <a:pPr>
-              <a:spcAft>
-                <a:spcPts val="600"/>
-              </a:spcAft>
-            </a:pPr>
-            <a:r>
-              <a:rPr sz="1500">
-                <a:solidFill>
-                  <a:srgbClr val="22282E"/>
-                </a:solidFill>
-              </a:rPr>
-              <a:t>•  Home lab IaC: Vagrant + VirtualBox/Proxmox, Ansible para aprovisionar, o plantillas tipo DetectionLab.</a:t>
-            </a:r>
-          </a:p>
-          <a:p>
-            <a:pPr>
-              <a:spcAft>
-                <a:spcPts val="600"/>
-              </a:spcAft>
-            </a:pPr>
-            <a:r>
-              <a:rPr sz="1500">
-                <a:solidFill>
-                  <a:srgbClr val="22282E"/>
-                </a:solidFill>
-              </a:rPr>
-              <a:t>•  Los entregables de los capstones (Clases 303–308) como base del portafolio.</a:t>
-            </a:r>
-          </a:p>
-          <a:p>
-            <a:pPr>
-              <a:spcAft>
-                <a:spcPts val="600"/>
-              </a:spcAft>
-            </a:pPr>
-            <a:r>
-              <a:rPr sz="1500">
-                <a:solidFill>
-                  <a:srgbClr val="22282E"/>
-                </a:solidFill>
-              </a:rPr>
-              <a:t>•  Una plantilla de writeup y una de informe anonimizado.</a:t>
+              <a:t>•  Término — Definición</a:t>
+            </a:r>
+          </a:p>
+          <a:p>
+            <a:pPr>
+              <a:spcAft>
+                <a:spcPts val="600"/>
+              </a:spcAft>
+            </a:pPr>
+            <a:r>
+              <a:rPr sz="1500">
+                <a:solidFill>
+                  <a:srgbClr val="22282E"/>
+                </a:solidFill>
+              </a:rPr>
+              <a:t>•  Artefacto — Evidencia concreta de capacidad, contextualizada y sanitizada.</a:t>
+            </a:r>
+          </a:p>
+          <a:p>
+            <a:pPr>
+              <a:spcAft>
+                <a:spcPts val="600"/>
+              </a:spcAft>
+            </a:pPr>
+            <a:r>
+              <a:rPr sz="1500">
+                <a:solidFill>
+                  <a:srgbClr val="22282E"/>
+                </a:solidFill>
+              </a:rPr>
+              <a:t>•  Evidencia — Resultado que otra persona puede revisar y relacionar con un criterio.</a:t>
+            </a:r>
+          </a:p>
+          <a:p>
+            <a:pPr>
+              <a:spcAft>
+                <a:spcPts val="600"/>
+              </a:spcAft>
+            </a:pPr>
+            <a:r>
+              <a:rPr sz="1500">
+                <a:solidFill>
+                  <a:srgbClr val="22282E"/>
+                </a:solidFill>
+              </a:rPr>
+              <a:t>•  Retrospectiva — Revisión de decisiones, límites y siguiente mejora.</a:t>
             </a:r>
           </a:p>
         </p:txBody>
@@ -4420,7 +4871,7 @@
                   <a:srgbClr val="0B3D2E"/>
                 </a:solidFill>
               </a:rPr>
-              <a:t>🧪 Laboratorio guiado</a:t>
+              <a:t>✅ Criterio de dominio</a:t>
             </a:r>
           </a:p>
         </p:txBody>
@@ -4458,97 +4909,7 @@
                   <a:srgbClr val="22282E"/>
                 </a:solidFill>
               </a:rPr>
-              <a:t>•  Inventaria tu trabajo. Lista los entregables de los capstones (informe pentest 303, Red Team 305, Blue Team 306, DFIR 307, reporte 308) y selecciona los mejores.</a:t>
-            </a:r>
-          </a:p>
-          <a:p>
-            <a:pPr>
-              <a:spcAft>
-                <a:spcPts val="600"/>
-              </a:spcAft>
-            </a:pPr>
-            <a:r>
-              <a:rPr sz="1500">
-                <a:solidFill>
-                  <a:srgbClr val="22282E"/>
-                </a:solidFill>
-              </a:rPr>
-              <a:t>•  Anonimiza. Reemplaza IPs, nombres y datos reales por valores ficticios; verifica que no queda PII.</a:t>
-            </a:r>
-          </a:p>
-          <a:p>
-            <a:pPr>
-              <a:spcAft>
-                <a:spcPts val="600"/>
-              </a:spcAft>
-            </a:pPr>
-            <a:r>
-              <a:rPr sz="1500">
-                <a:solidFill>
-                  <a:srgbClr val="22282E"/>
-                </a:solidFill>
-              </a:rPr>
-              <a:t>•  Crea el repo del portafolio. Estructura: /writeups, /informes, /homelab, /tools, con un README.md índice.</a:t>
-            </a:r>
-          </a:p>
-          <a:p>
-            <a:pPr>
-              <a:spcAft>
-                <a:spcPts val="600"/>
-              </a:spcAft>
-            </a:pPr>
-            <a:r>
-              <a:rPr sz="1500">
-                <a:solidFill>
-                  <a:srgbClr val="22282E"/>
-                </a:solidFill>
-              </a:rPr>
-              <a:t>•  Escribe 2 writeups. Elige dos máquinas/retos y documenta el razonamiento (no solo la solución).</a:t>
-            </a:r>
-          </a:p>
-          <a:p>
-            <a:pPr>
-              <a:spcAft>
-                <a:spcPts val="600"/>
-              </a:spcAft>
-            </a:pPr>
-            <a:r>
-              <a:rPr sz="1500">
-                <a:solidFill>
-                  <a:srgbClr val="22282E"/>
-                </a:solidFill>
-              </a:rPr>
-              <a:t>•  Monta el blog. Genera un sitio con MkDocs/Hugo y publica los writeups; despliega en GitHub Pages.</a:t>
-            </a:r>
-          </a:p>
-          <a:p>
-            <a:pPr>
-              <a:spcAft>
-                <a:spcPts val="600"/>
-              </a:spcAft>
-            </a:pPr>
-            <a:r>
-              <a:rPr sz="1500">
-                <a:solidFill>
-                  <a:srgbClr val="22282E"/>
-                </a:solidFill>
-              </a:rPr>
-              <a:t>•  Codifica el home lab. Escribe un Vagrantfile que levante tu laboratorio base (Kali + víctima + SIEM):</a:t>
-            </a:r>
-          </a:p>
-          <a:p>
-            <a:pPr>
-              <a:spcAft>
-                <a:spcPts val="600"/>
-              </a:spcAft>
-            </a:pPr>
-            <a:r>
-              <a:rPr sz="1500">
-                <a:solidFill>
-                  <a:srgbClr val="22282E"/>
-                </a:solidFill>
-              </a:rPr>
-              <a:t>•  Vagrant.configure("2") do |config|</a:t>
+              <a:t>•  El alumno domina la clase cuando planifica, ejecuta y comunica una evidencia completa, respeta alcance y puede defender sus decisiones ante una revisión.</a:t>
             </a:r>
           </a:p>
         </p:txBody>
@@ -4599,7 +4960,7 @@
                   <a:srgbClr val="0B3D2E"/>
                 </a:solidFill>
               </a:rPr>
-              <a:t>✍️ Ejercicios</a:t>
+              <a:t>📖 Definiciones y características</a:t>
             </a:r>
           </a:p>
         </p:txBody>
@@ -4637,82 +4998,82 @@
                   <a:srgbClr val="22282E"/>
                 </a:solidFill>
               </a:rPr>
-              <a:t>•  Estructura el árbol de carpetas de tu portafolio.</a:t>
-            </a:r>
-          </a:p>
-          <a:p>
-            <a:pPr>
-              <a:spcAft>
-                <a:spcPts val="600"/>
-              </a:spcAft>
-            </a:pPr>
-            <a:r>
-              <a:rPr sz="1500">
-                <a:solidFill>
-                  <a:srgbClr val="22282E"/>
-                </a:solidFill>
-              </a:rPr>
-              <a:t>•  Anonimiza un informe de capstone y verifica que no queda dato real.</a:t>
-            </a:r>
-          </a:p>
-          <a:p>
-            <a:pPr>
-              <a:spcAft>
-                <a:spcPts val="600"/>
-              </a:spcAft>
-            </a:pPr>
-            <a:r>
-              <a:rPr sz="1500">
-                <a:solidFill>
-                  <a:srgbClr val="22282E"/>
-                </a:solidFill>
-              </a:rPr>
-              <a:t>•  Escribe un writeup completo de una máquina.</a:t>
-            </a:r>
-          </a:p>
-          <a:p>
-            <a:pPr>
-              <a:spcAft>
-                <a:spcPts val="600"/>
-              </a:spcAft>
-            </a:pPr>
-            <a:r>
-              <a:rPr sz="1500">
-                <a:solidFill>
-                  <a:srgbClr val="22282E"/>
-                </a:solidFill>
-              </a:rPr>
-              <a:t>•  Crea un Vagrantfile que levante dos VMs en una red privada.</a:t>
-            </a:r>
-          </a:p>
-          <a:p>
-            <a:pPr>
-              <a:spcAft>
-                <a:spcPts val="600"/>
-              </a:spcAft>
-            </a:pPr>
-            <a:r>
-              <a:rPr sz="1500">
-                <a:solidFill>
-                  <a:srgbClr val="22282E"/>
-                </a:solidFill>
-              </a:rPr>
-              <a:t>•  Publica el blog en GitHub Pages con al menos un post.</a:t>
-            </a:r>
-          </a:p>
-          <a:p>
-            <a:pPr>
-              <a:spcAft>
-                <a:spcPts val="600"/>
-              </a:spcAft>
-            </a:pPr>
-            <a:r>
-              <a:rPr sz="1500">
-                <a:solidFill>
-                  <a:srgbClr val="22282E"/>
-                </a:solidFill>
-              </a:rPr>
-              <a:t>•  Redacta un README de home lab reproducible con diagrama.</a:t>
+              <a:t>•  Portafolio: colección curada de trabajo demostrable. Característica: prioriza calidad y evidencia sobre cantidad.</a:t>
+            </a:r>
+          </a:p>
+          <a:p>
+            <a:pPr>
+              <a:spcAft>
+                <a:spcPts val="600"/>
+              </a:spcAft>
+            </a:pPr>
+            <a:r>
+              <a:rPr sz="1500">
+                <a:solidFill>
+                  <a:srgbClr val="22282E"/>
+                </a:solidFill>
+              </a:rPr>
+              <a:t>•  Writeup: explicación paso a paso de cómo resolviste un reto. Característica: revela tu proceso de pensamiento.</a:t>
+            </a:r>
+          </a:p>
+          <a:p>
+            <a:pPr>
+              <a:spcAft>
+                <a:spcPts val="600"/>
+              </a:spcAft>
+            </a:pPr>
+            <a:r>
+              <a:rPr sz="1500">
+                <a:solidFill>
+                  <a:srgbClr val="22282E"/>
+                </a:solidFill>
+              </a:rPr>
+              <a:t>•  Infraestructura como código (IaC): definir el lab en archivos (Vagrant/Terraform/Ansible). Característica: reproducible y versionable.</a:t>
+            </a:r>
+          </a:p>
+          <a:p>
+            <a:pPr>
+              <a:spcAft>
+                <a:spcPts val="600"/>
+              </a:spcAft>
+            </a:pPr>
+            <a:r>
+              <a:rPr sz="1500">
+                <a:solidFill>
+                  <a:srgbClr val="22282E"/>
+                </a:solidFill>
+              </a:rPr>
+              <a:t>•  Home lab: entorno personal de práctica permanente. Característica: aislado, seguro y desechable.</a:t>
+            </a:r>
+          </a:p>
+          <a:p>
+            <a:pPr>
+              <a:spcAft>
+                <a:spcPts val="600"/>
+              </a:spcAft>
+            </a:pPr>
+            <a:r>
+              <a:rPr sz="1500">
+                <a:solidFill>
+                  <a:srgbClr val="22282E"/>
+                </a:solidFill>
+              </a:rPr>
+              <a:t>•  Anonimización: eliminar datos identificables antes de publicar. Característica: obligatoria en informes reales.</a:t>
+            </a:r>
+          </a:p>
+          <a:p>
+            <a:pPr>
+              <a:spcAft>
+                <a:spcPts val="600"/>
+              </a:spcAft>
+            </a:pPr>
+            <a:r>
+              <a:rPr sz="1500">
+                <a:solidFill>
+                  <a:srgbClr val="22282E"/>
+                </a:solidFill>
+              </a:rPr>
+              <a:t>•  Marca profesional: coherencia de perfil entre GitHub, blog y LinkedIn. Característica: facilita que te encuentren.</a:t>
             </a:r>
           </a:p>
         </p:txBody>
@@ -4763,7 +5124,7 @@
                   <a:srgbClr val="0B3D2E"/>
                 </a:solidFill>
               </a:rPr>
-              <a:t>📝 Reto verificable</a:t>
+              <a:t>🧰 Herramientas y preparación</a:t>
             </a:r>
           </a:p>
         </p:txBody>
@@ -4801,22 +5162,67 @@
                   <a:srgbClr val="22282E"/>
                 </a:solidFill>
               </a:rPr>
-              <a:t>•  Publica un portafolio (repo público + blog) que incluya: índice, al menos 2 writeups, 1 informe de capstone anonimizado y un home lab como código (Vagrant/Ansible) con documentación para levantarlo.</a:t>
-            </a:r>
-          </a:p>
-          <a:p>
-            <a:pPr>
-              <a:spcAft>
-                <a:spcPts val="600"/>
-              </a:spcAft>
-            </a:pPr>
-            <a:r>
-              <a:rPr sz="1500">
-                <a:solidFill>
-                  <a:srgbClr val="22282E"/>
-                </a:solidFill>
-              </a:rPr>
-              <a:t>•  Criterio de aceptación: un tercero puede clonar el repo y levantar el home lab con un comando documentado, el blog es accesible públicamente, los informes no contienen datos reales, y el índice enlaza todos los artefactos.</a:t>
+              <a:t>•  GitHub/GitLab para repos y para alojar el blog (GitHub Pages).</a:t>
+            </a:r>
+          </a:p>
+          <a:p>
+            <a:pPr>
+              <a:spcAft>
+                <a:spcPts val="600"/>
+              </a:spcAft>
+            </a:pPr>
+            <a:r>
+              <a:rPr sz="1500">
+                <a:solidFill>
+                  <a:srgbClr val="22282E"/>
+                </a:solidFill>
+              </a:rPr>
+              <a:t>•  Blog estático: Hugo, Jekyll o MkDocs.</a:t>
+            </a:r>
+          </a:p>
+          <a:p>
+            <a:pPr>
+              <a:spcAft>
+                <a:spcPts val="600"/>
+              </a:spcAft>
+            </a:pPr>
+            <a:r>
+              <a:rPr sz="1500">
+                <a:solidFill>
+                  <a:srgbClr val="22282E"/>
+                </a:solidFill>
+              </a:rPr>
+              <a:t>•  Home lab IaC: Vagrant + VirtualBox/Proxmox, Ansible para aprovisionar, o plantillas tipo DetectionLab.</a:t>
+            </a:r>
+          </a:p>
+          <a:p>
+            <a:pPr>
+              <a:spcAft>
+                <a:spcPts val="600"/>
+              </a:spcAft>
+            </a:pPr>
+            <a:r>
+              <a:rPr sz="1500">
+                <a:solidFill>
+                  <a:srgbClr val="22282E"/>
+                </a:solidFill>
+              </a:rPr>
+              <a:t>•  Los entregables de los capstones (Clases 303–308) como base del portafolio.</a:t>
+            </a:r>
+          </a:p>
+          <a:p>
+            <a:pPr>
+              <a:spcAft>
+                <a:spcPts val="600"/>
+              </a:spcAft>
+            </a:pPr>
+            <a:r>
+              <a:rPr sz="1500">
+                <a:solidFill>
+                  <a:srgbClr val="22282E"/>
+                </a:solidFill>
+              </a:rPr>
+              <a:t>•  Una plantilla de writeup y una de informe anonimizado.</a:t>
             </a:r>
           </a:p>
         </p:txBody>
